--- a/workshop/Copilot-Studio-Workshop-Slides/Module-12-Evaluation-and-ROI.pptx
+++ b/workshop/Copilot-Studio-Workshop-Slides/Module-12-Evaluation-and-ROI.pptx
@@ -6,6 +6,7 @@
   </p:sldMasterIdLst>
   <p:sldIdLst>
     <p:sldId id="256" r:id="rId2"/>
+    <p:sldId id="262" r:id="rId13"/>
     <p:sldId id="257" r:id="rId3"/>
     <p:sldId id="258" r:id="rId4"/>
     <p:sldId id="259" r:id="rId5"/>
@@ -973,6 +974,70 @@
               <a:t>6</a:t>
             </a:fld>
             <a:endParaRPr lang="en-US"/>
+          </a:p>
+        </p:txBody>
+      </p:sp>
+    </p:spTree>
+    <p:extLst>
+      <p:ext uri="{BB962C8B-B14F-4D97-AF65-F5344CB8AC3E}">
+        <p14:creationId xmlns:p14="http://schemas.microsoft.com/office/powerpoint/2010/main" val="1024086991"/>
+      </p:ext>
+    </p:extLst>
+  </p:cSld>
+  <p:clrMapOvr>
+    <a:masterClrMapping/>
+  </p:clrMapOvr>
+</p:notes>
+</file>
+
+<file path=ppt/notesSlides/notesSlide7.xml><?xml version="1.0" encoding="utf-8"?>
+<p:notes xmlns:a="http://schemas.openxmlformats.org/drawingml/2006/main" xmlns:r="http://schemas.openxmlformats.org/officeDocument/2006/relationships" xmlns:p="http://schemas.openxmlformats.org/presentationml/2006/main">
+  <p:cSld>
+    <p:spTree>
+      <p:nvGrpSpPr>
+        <p:cNvPr id="1" name=""/>
+        <p:cNvGrpSpPr/>
+        <p:nvPr/>
+      </p:nvGrpSpPr>
+      <p:grpSpPr>
+        <a:xfrm>
+          <a:off x="0" y="0"/>
+          <a:ext cx="0" cy="0"/>
+          <a:chOff x="0" y="0"/>
+          <a:chExt cx="0" cy="0"/>
+        </a:xfrm>
+      </p:grpSpPr>
+      <p:sp>
+        <p:nvSpPr>
+          <p:cNvPr id="2" name="Slide Image Placeholder 1"/>
+          <p:cNvSpPr>
+            <a:spLocks noGrp="1" noRot="1" noChangeAspect="1"/>
+          </p:cNvSpPr>
+          <p:nvPr>
+            <p:ph type="sldImg"/>
+          </p:nvPr>
+        </p:nvSpPr>
+        <p:spPr/>
+      </p:sp>
+      <p:sp>
+        <p:nvSpPr>
+          <p:cNvPr id="3" name="Notes Placeholder 2"/>
+          <p:cNvSpPr>
+            <a:spLocks noGrp="1"/>
+          </p:cNvSpPr>
+          <p:nvPr>
+            <p:ph type="body" idx="1"/>
+          </p:nvPr>
+        </p:nvSpPr>
+        <p:spPr/>
+        <p:txBody>
+          <a:bodyPr/>
+          <a:lstStyle/>
+          <a:p>
+            <a:r>
+              <a:rPr lang="en-US" dirty="0"/>
+              <a:t>Walk through all four grader types before Lab 24 so participants can make an informed choice when configuring their evaluation test set. Emphasize that General quality is the safe default, but Tool use is critical whenever the agent must invoke a specific action or connector. Connect Keyword match to real compliance scenarios such as mandatory disclosure language or branding terms.</a:t>
+            </a:r>
           </a:p>
         </p:txBody>
       </p:sp>
@@ -5449,6 +5514,960 @@
 </p:sld>
 </file>
 
+<file path=ppt/slides/slide7.xml><?xml version="1.0" encoding="utf-8"?>
+<p:sld xmlns:a="http://schemas.openxmlformats.org/drawingml/2006/main" xmlns:r="http://schemas.openxmlformats.org/officeDocument/2006/relationships" xmlns:p="http://schemas.openxmlformats.org/presentationml/2006/main">
+  <p:cSld name="Evaluation Grader Types">
+    <p:bg>
+      <p:bgPr>
+        <a:solidFill>
+          <a:srgbClr val="FFFFFF"/>
+        </a:solidFill>
+      </p:bgPr>
+    </p:bg>
+    <p:spTree>
+      <p:nvGrpSpPr>
+        <p:cNvPr id="1" name=""/>
+        <p:cNvGrpSpPr/>
+        <p:nvPr/>
+      </p:nvGrpSpPr>
+      <p:grpSpPr>
+        <a:xfrm>
+          <a:off x="0" y="0"/>
+          <a:ext cx="0" cy="0"/>
+          <a:chOff x="0" y="0"/>
+          <a:chExt cx="0" cy="0"/>
+        </a:xfrm>
+      </p:grpSpPr>
+      <p:sp>
+        <p:nvSpPr>
+          <p:cNvPr id="2" name="Shape 0"/>
+          <p:cNvSpPr/>
+          <p:nvPr/>
+        </p:nvSpPr>
+        <p:spPr>
+          <a:xfrm>
+            <a:off x="0" y="0"/>
+            <a:ext cx="9144000" cy="640080"/>
+          </a:xfrm>
+          <a:prstGeom prst="rect">
+            <a:avLst/>
+          </a:prstGeom>
+          <a:solidFill>
+            <a:srgbClr val="0078D4"/>
+          </a:solidFill>
+          <a:ln w="12700">
+            <a:solidFill>
+              <a:srgbClr val="0078D4"/>
+            </a:solidFill>
+            <a:prstDash val="solid"/>
+          </a:ln>
+        </p:spPr>
+      </p:sp>
+      <p:sp>
+        <p:nvSpPr>
+          <p:cNvPr id="3" name="Text 1"/>
+          <p:cNvSpPr/>
+          <p:nvPr/>
+        </p:nvSpPr>
+        <p:spPr>
+          <a:xfrm>
+            <a:off x="365760" y="0"/>
+            <a:ext cx="8412480" cy="640080"/>
+          </a:xfrm>
+          <a:prstGeom prst="rect">
+            <a:avLst/>
+          </a:prstGeom>
+          <a:noFill/>
+          <a:ln/>
+        </p:spPr>
+        <p:txBody>
+          <a:bodyPr wrap="square" rtlCol="0" anchor="ctr"/>
+          <a:lstStyle/>
+          <a:p>
+            <a:pPr indent="0" marL="0">
+              <a:buNone/>
+            </a:pPr>
+            <a:r>
+              <a:rPr lang="en-US" sz="900" spc="200" kern="0" dirty="0">
+                <a:solidFill>
+                  <a:srgbClr val="C5D8F0"/>
+                </a:solidFill>
+                <a:latin typeface="Segoe UI" pitchFamily="34" charset="0"/>
+                <a:ea typeface="Segoe UI" pitchFamily="34" charset="-122"/>
+                <a:cs typeface="Segoe UI" pitchFamily="34" charset="-120"/>
+              </a:rPr>
+              <a:t>MODULE 12  ·  EVALUATION FRAMEWORK</a:t>
+            </a:r>
+            <a:endParaRPr lang="en-US" sz="900" dirty="0"/>
+          </a:p>
+        </p:txBody>
+      </p:sp>
+      <p:sp>
+        <p:nvSpPr>
+          <p:cNvPr id="4" name="Text 2"/>
+          <p:cNvSpPr/>
+          <p:nvPr/>
+        </p:nvSpPr>
+        <p:spPr>
+          <a:xfrm>
+            <a:off x="365760" y="749808"/>
+            <a:ext cx="8412480" cy="475488"/>
+          </a:xfrm>
+          <a:prstGeom prst="rect">
+            <a:avLst/>
+          </a:prstGeom>
+          <a:noFill/>
+          <a:ln/>
+        </p:spPr>
+        <p:txBody>
+          <a:bodyPr wrap="square" rtlCol="0" anchor="ctr"/>
+          <a:lstStyle/>
+          <a:p>
+            <a:pPr indent="0" marL="0">
+              <a:buNone/>
+            </a:pPr>
+            <a:r>
+              <a:rPr lang="en-US" sz="2800" b="1" dirty="0">
+                <a:solidFill>
+                  <a:srgbClr val="201F1E"/>
+                </a:solidFill>
+                <a:latin typeface="Segoe UI" pitchFamily="34" charset="0"/>
+                <a:ea typeface="Segoe UI" pitchFamily="34" charset="-122"/>
+                <a:cs typeface="Segoe UI" pitchFamily="34" charset="-120"/>
+              </a:rPr>
+              <a:t>Evaluation Grader Types</a:t>
+            </a:r>
+            <a:endParaRPr lang="en-US" sz="2800" dirty="0"/>
+          </a:p>
+        </p:txBody>
+      </p:sp>
+      <p:sp>
+        <p:nvSpPr>
+          <p:cNvPr id="5" name="Text 3"/>
+          <p:cNvSpPr/>
+          <p:nvPr/>
+        </p:nvSpPr>
+        <p:spPr>
+          <a:xfrm>
+            <a:off x="365760" y="1280160"/>
+            <a:ext cx="8229600" cy="320040"/>
+          </a:xfrm>
+          <a:prstGeom prst="rect">
+            <a:avLst/>
+          </a:prstGeom>
+          <a:noFill/>
+          <a:ln/>
+        </p:spPr>
+        <p:txBody>
+          <a:bodyPr wrap="square" rtlCol="0" anchor="ctr"/>
+          <a:lstStyle/>
+          <a:p>
+            <a:pPr indent="0" marL="0">
+              <a:buNone/>
+            </a:pPr>
+            <a:r>
+              <a:rPr lang="en-US" sz="1200" dirty="0">
+                <a:solidFill>
+                  <a:srgbClr val="605E5C"/>
+                </a:solidFill>
+                <a:latin typeface="Segoe UI" pitchFamily="34" charset="0"/>
+                <a:ea typeface="Segoe UI" pitchFamily="34" charset="-122"/>
+                <a:cs typeface="Segoe UI" pitchFamily="34" charset="-120"/>
+              </a:rPr>
+              <a:t>A reusable release gate — score behavior with evidence, diagnose why it failed, and feed improvements back in.</a:t>
+            </a:r>
+            <a:endParaRPr lang="en-US" sz="1200" dirty="0"/>
+          </a:p>
+        </p:txBody>
+      </p:sp>
+      <p:sp>
+        <p:nvSpPr>
+          <p:cNvPr id="6" name="Shape 4"/>
+          <p:cNvSpPr/>
+          <p:nvPr/>
+        </p:nvSpPr>
+        <p:spPr>
+          <a:xfrm>
+            <a:off x="274320" y="1737360"/>
+            <a:ext cx="5029200" cy="2651760"/>
+          </a:xfrm>
+          <a:prstGeom prst="rect">
+            <a:avLst/>
+          </a:prstGeom>
+          <a:solidFill>
+            <a:srgbClr val="F3F2F1"/>
+          </a:solidFill>
+          <a:ln w="12700">
+            <a:solidFill>
+              <a:srgbClr val="E1DFDD"/>
+            </a:solidFill>
+            <a:prstDash val="solid"/>
+          </a:ln>
+          <a:effectLst>
+            <a:outerShdw sx="100000" sy="100000" kx="0" ky="0" algn="bl" rotWithShape="0" blurRad="101600" dist="25400" dir="8100000">
+              <a:srgbClr val="000000">
+                <a:alpha val="10000"/>
+              </a:srgbClr>
+            </a:outerShdw>
+          </a:effectLst>
+        </p:spPr>
+      </p:sp>
+      <p:sp>
+        <p:nvSpPr>
+          <p:cNvPr id="7" name="Shape 5"/>
+          <p:cNvSpPr/>
+          <p:nvPr/>
+        </p:nvSpPr>
+        <p:spPr>
+          <a:xfrm>
+            <a:off x="274320" y="1737360"/>
+            <a:ext cx="5029200" cy="365760"/>
+          </a:xfrm>
+          <a:prstGeom prst="rect">
+            <a:avLst/>
+          </a:prstGeom>
+          <a:solidFill>
+            <a:srgbClr val="0078D4"/>
+          </a:solidFill>
+          <a:ln w="12700">
+            <a:solidFill>
+              <a:srgbClr val="0078D4"/>
+            </a:solidFill>
+            <a:prstDash val="solid"/>
+          </a:ln>
+        </p:spPr>
+      </p:sp>
+      <p:sp>
+        <p:nvSpPr>
+          <p:cNvPr id="8" name="Text 6"/>
+          <p:cNvSpPr/>
+          <p:nvPr/>
+        </p:nvSpPr>
+        <p:spPr>
+          <a:xfrm>
+            <a:off x="384048" y="1737360"/>
+            <a:ext cx="4800600" cy="365760"/>
+          </a:xfrm>
+          <a:prstGeom prst="rect">
+            <a:avLst/>
+          </a:prstGeom>
+          <a:noFill/>
+          <a:ln/>
+        </p:spPr>
+        <p:txBody>
+          <a:bodyPr wrap="square" rtlCol="0" anchor="ctr"/>
+          <a:lstStyle/>
+          <a:p>
+            <a:pPr indent="0" marL="0">
+              <a:buNone/>
+            </a:pPr>
+            <a:r>
+              <a:rPr lang="en-US" sz="1100" b="1" dirty="0">
+                <a:solidFill>
+                  <a:srgbClr val="FFFFFF"/>
+                </a:solidFill>
+                <a:latin typeface="Segoe UI" pitchFamily="34" charset="0"/>
+                <a:ea typeface="Segoe UI" pitchFamily="34" charset="-122"/>
+                <a:cs typeface="Segoe UI" pitchFamily="34" charset="-120"/>
+              </a:rPr>
+              <a:t>General Quality</a:t>
+            </a:r>
+            <a:endParaRPr lang="en-US" sz="1100" dirty="0"/>
+          </a:p>
+        </p:txBody>
+      </p:sp>
+      <p:sp>
+        <p:nvSpPr>
+          <p:cNvPr id="9" name="Text 7"/>
+          <p:cNvSpPr/>
+          <p:nvPr/>
+        </p:nvSpPr>
+        <p:spPr>
+          <a:xfrm>
+            <a:off x="384048" y="2212848"/>
+            <a:ext cx="4800600" cy="2103120"/>
+          </a:xfrm>
+          <a:prstGeom prst="rect">
+            <a:avLst/>
+          </a:prstGeom>
+          <a:noFill/>
+          <a:ln/>
+        </p:spPr>
+        <p:txBody>
+          <a:bodyPr wrap="square" rtlCol="0" anchor="ctr"/>
+          <a:lstStyle/>
+          <a:p>
+            <a:pPr marL="342900" indent="-342900">
+              <a:buSzPct val="100000"/>
+              <a:buChar char="•"/>
+            </a:pPr>
+            <a:r>
+              <a:rPr lang="en-US" sz="1050" dirty="0">
+                <a:solidFill>
+                  <a:srgbClr val="201F1E"/>
+                </a:solidFill>
+                <a:latin typeface="Segoe UI" pitchFamily="34" charset="0"/>
+                <a:ea typeface="Segoe UI" pitchFamily="34" charset="-122"/>
+                <a:cs typeface="Segoe UI" pitchFamily="34" charset="-120"/>
+              </a:rPr>
+              <a:t>Evaluation page shows completed run for 'Hiring Agent - Day 2 QA Baseline'</a:t>
+            </a:r>
+            <a:endParaRPr lang="en-US" sz="1050" dirty="0"/>
+          </a:p>
+          <a:p>
+            <a:pPr marL="342900" indent="-342900">
+              <a:buSzPct val="100000"/>
+              <a:buChar char="•"/>
+            </a:pPr>
+            <a:r>
+              <a:rPr lang="en-US" sz="1050" dirty="0">
+                <a:solidFill>
+                  <a:srgbClr val="201F1E"/>
+                </a:solidFill>
+                <a:latin typeface="Segoe UI" pitchFamily="34" charset="0"/>
+                <a:ea typeface="Segoe UI" pitchFamily="34" charset="-122"/>
+                <a:cs typeface="Segoe UI" pitchFamily="34" charset="-120"/>
+              </a:rPr>
+              <a:t>Failed test case opened with grader reasoning and activity map evidence</a:t>
+            </a:r>
+            <a:endParaRPr lang="en-US" sz="1050" dirty="0"/>
+          </a:p>
+          <a:p>
+            <a:pPr marL="342900" indent="-342900">
+              <a:buSzPct val="100000"/>
+              <a:buChar char="•"/>
+            </a:pPr>
+            <a:r>
+              <a:rPr lang="en-US" sz="1050" dirty="0">
+                <a:solidFill>
+                  <a:srgbClr val="201F1E"/>
+                </a:solidFill>
+                <a:latin typeface="Segoe UI" pitchFamily="34" charset="0"/>
+                <a:ea typeface="Segoe UI" pitchFamily="34" charset="-122"/>
+                <a:cs typeface="Segoe UI" pitchFamily="34" charset="-120"/>
+              </a:rPr>
+              <a:t>Hiring Agent instructions include a targeted improvement based on failing case</a:t>
+            </a:r>
+            <a:endParaRPr lang="en-US" sz="1050" dirty="0"/>
+          </a:p>
+          <a:p>
+            <a:pPr marL="342900" indent="-342900">
+              <a:buSzPct val="100000"/>
+              <a:buChar char="•"/>
+            </a:pPr>
+            <a:r>
+              <a:rPr lang="en-US" sz="1050" dirty="0">
+                <a:solidFill>
+                  <a:srgbClr val="201F1E"/>
+                </a:solidFill>
+                <a:latin typeface="Segoe UI" pitchFamily="34" charset="0"/>
+                <a:ea typeface="Segoe UI" pitchFamily="34" charset="-122"/>
+                <a:cs typeface="Segoe UI" pitchFamily="34" charset="-120"/>
+              </a:rPr>
+              <a:t>Second evaluation run exists and comparison shows the improvement cycle</a:t>
+            </a:r>
+            <a:endParaRPr lang="en-US" sz="1050" dirty="0"/>
+          </a:p>
+          <a:p>
+            <a:pPr marL="342900" indent="-342900">
+              <a:buSzPct val="100000"/>
+              <a:buChar char="•"/>
+            </a:pPr>
+            <a:r>
+              <a:rPr lang="en-US" sz="1050" dirty="0">
+                <a:solidFill>
+                  <a:srgbClr val="201F1E"/>
+                </a:solidFill>
+                <a:latin typeface="Segoe UI" pitchFamily="34" charset="0"/>
+                <a:ea typeface="Segoe UI" pitchFamily="34" charset="-122"/>
+                <a:cs typeface="Segoe UI" pitchFamily="34" charset="-120"/>
+              </a:rPr>
+              <a:t>Pass rate improved or failure reason documented for future work</a:t>
+            </a:r>
+            <a:endParaRPr lang="en-US" sz="1050" dirty="0"/>
+          </a:p>
+        </p:txBody>
+      </p:sp>
+      <p:sp>
+        <p:nvSpPr>
+          <p:cNvPr id="10" name="Shape 8"/>
+          <p:cNvSpPr/>
+          <p:nvPr/>
+        </p:nvSpPr>
+        <p:spPr>
+          <a:xfrm>
+            <a:off x="5486400" y="1737360"/>
+            <a:ext cx="3383280" cy="2651760"/>
+          </a:xfrm>
+          <a:prstGeom prst="rect">
+            <a:avLst/>
+          </a:prstGeom>
+          <a:solidFill>
+            <a:srgbClr val="EFF6FC"/>
+          </a:solidFill>
+          <a:ln w="12700">
+            <a:solidFill>
+              <a:srgbClr val="C7E0F4"/>
+            </a:solidFill>
+            <a:prstDash val="solid"/>
+          </a:ln>
+          <a:effectLst>
+            <a:outerShdw sx="100000" sy="100000" kx="0" ky="0" algn="bl" rotWithShape="0" blurRad="101600" dist="25400" dir="8100000">
+              <a:srgbClr val="000000">
+                <a:alpha val="10000"/>
+              </a:srgbClr>
+            </a:outerShdw>
+          </a:effectLst>
+        </p:spPr>
+      </p:sp>
+      <p:sp>
+        <p:nvSpPr>
+          <p:cNvPr id="11" name="Shape 9"/>
+          <p:cNvSpPr/>
+          <p:nvPr/>
+        </p:nvSpPr>
+        <p:spPr>
+          <a:xfrm>
+            <a:off x="5486400" y="1737360"/>
+            <a:ext cx="3383280" cy="365760"/>
+          </a:xfrm>
+          <a:prstGeom prst="rect">
+            <a:avLst/>
+          </a:prstGeom>
+          <a:solidFill>
+            <a:srgbClr val="243A5E"/>
+          </a:solidFill>
+          <a:ln w="12700">
+            <a:solidFill>
+              <a:srgbClr val="243A5E"/>
+            </a:solidFill>
+            <a:prstDash val="solid"/>
+          </a:ln>
+        </p:spPr>
+      </p:sp>
+      <p:sp>
+        <p:nvSpPr>
+          <p:cNvPr id="12" name="Text 10"/>
+          <p:cNvSpPr/>
+          <p:nvPr/>
+        </p:nvSpPr>
+        <p:spPr>
+          <a:xfrm>
+            <a:off x="5596128" y="1737360"/>
+            <a:ext cx="3154680" cy="365760"/>
+          </a:xfrm>
+          <a:prstGeom prst="rect">
+            <a:avLst/>
+          </a:prstGeom>
+          <a:noFill/>
+          <a:ln/>
+        </p:spPr>
+        <p:txBody>
+          <a:bodyPr wrap="square" rtlCol="0" anchor="ctr"/>
+          <a:lstStyle/>
+          <a:p>
+            <a:pPr indent="0" marL="0">
+              <a:buNone/>
+            </a:pPr>
+            <a:r>
+              <a:rPr lang="en-US" sz="1100" b="1" dirty="0">
+                <a:solidFill>
+                  <a:srgbClr val="FFFFFF"/>
+                </a:solidFill>
+                <a:latin typeface="Segoe UI" pitchFamily="34" charset="0"/>
+                <a:ea typeface="Segoe UI" pitchFamily="34" charset="-122"/>
+                <a:cs typeface="Segoe UI" pitchFamily="34" charset="-120"/>
+              </a:rPr>
+              <a:t>Quality Tool Use</a:t>
+            </a:r>
+            <a:endParaRPr lang="en-US" sz="1100" dirty="0"/>
+          </a:p>
+        </p:txBody>
+      </p:sp>
+      <p:sp>
+        <p:nvSpPr>
+          <p:cNvPr id="13" name="Shape 11"/>
+          <p:cNvSpPr/>
+          <p:nvPr/>
+        </p:nvSpPr>
+        <p:spPr>
+          <a:xfrm>
+            <a:off x="5596128" y="2249424"/>
+            <a:ext cx="914400" cy="237744"/>
+          </a:xfrm>
+          <a:prstGeom prst="rect">
+            <a:avLst/>
+          </a:prstGeom>
+          <a:solidFill>
+            <a:srgbClr val="0078D4"/>
+          </a:solidFill>
+          <a:ln w="12700">
+            <a:solidFill>
+              <a:srgbClr val="0078D4"/>
+            </a:solidFill>
+            <a:prstDash val="solid"/>
+          </a:ln>
+        </p:spPr>
+      </p:sp>
+      <p:sp>
+        <p:nvSpPr>
+          <p:cNvPr id="14" name="Text 12"/>
+          <p:cNvSpPr/>
+          <p:nvPr/>
+        </p:nvSpPr>
+        <p:spPr>
+          <a:xfrm>
+            <a:off x="5596128" y="2249424"/>
+            <a:ext cx="914400" cy="237744"/>
+          </a:xfrm>
+          <a:prstGeom prst="rect">
+            <a:avLst/>
+          </a:prstGeom>
+          <a:noFill/>
+          <a:ln/>
+        </p:spPr>
+        <p:txBody>
+          <a:bodyPr wrap="square" lIns="0" tIns="0" rIns="0" bIns="0" rtlCol="0" anchor="ctr"/>
+          <a:lstStyle/>
+          <a:p>
+            <a:pPr algn="ctr" indent="0" marL="0">
+              <a:buNone/>
+            </a:pPr>
+            <a:r>
+              <a:rPr lang="en-US" sz="850" b="1" dirty="0">
+                <a:solidFill>
+                  <a:srgbClr val="FFFFFF"/>
+                </a:solidFill>
+                <a:latin typeface="Segoe UI" pitchFamily="34" charset="0"/>
+                <a:ea typeface="Segoe UI" pitchFamily="34" charset="-122"/>
+                <a:cs typeface="Segoe UI" pitchFamily="34" charset="-120"/>
+              </a:rPr>
+              <a:t>1  Evaluate</a:t>
+            </a:r>
+            <a:endParaRPr lang="en-US" sz="850" dirty="0"/>
+          </a:p>
+        </p:txBody>
+      </p:sp>
+      <p:sp>
+        <p:nvSpPr>
+          <p:cNvPr id="15" name="Text 13"/>
+          <p:cNvSpPr/>
+          <p:nvPr/>
+        </p:nvSpPr>
+        <p:spPr>
+          <a:xfrm>
+            <a:off x="6583680" y="2212848"/>
+            <a:ext cx="2176272" cy="384048"/>
+          </a:xfrm>
+          <a:prstGeom prst="rect">
+            <a:avLst/>
+          </a:prstGeom>
+          <a:noFill/>
+          <a:ln/>
+        </p:spPr>
+        <p:txBody>
+          <a:bodyPr wrap="square" lIns="0" tIns="0" rIns="0" bIns="0" rtlCol="0" anchor="ctr"/>
+          <a:lstStyle/>
+          <a:p>
+            <a:pPr indent="0" marL="0">
+              <a:buNone/>
+            </a:pPr>
+            <a:r>
+              <a:rPr lang="en-US" sz="950" dirty="0">
+                <a:solidFill>
+                  <a:srgbClr val="201F1E"/>
+                </a:solidFill>
+                <a:latin typeface="Segoe UI" pitchFamily="34" charset="0"/>
+                <a:ea typeface="Segoe UI" pitchFamily="34" charset="-122"/>
+                <a:cs typeface="Segoe UI" pitchFamily="34" charset="-120"/>
+              </a:rPr>
+              <a:t>Run scored test set against the current agent baseline</a:t>
+            </a:r>
+            <a:endParaRPr lang="en-US" sz="950" dirty="0"/>
+          </a:p>
+        </p:txBody>
+      </p:sp>
+      <p:sp>
+        <p:nvSpPr>
+          <p:cNvPr id="16" name="Shape 14"/>
+          <p:cNvSpPr/>
+          <p:nvPr/>
+        </p:nvSpPr>
+        <p:spPr>
+          <a:xfrm>
+            <a:off x="5596128" y="2779776"/>
+            <a:ext cx="914400" cy="237744"/>
+          </a:xfrm>
+          <a:prstGeom prst="rect">
+            <a:avLst/>
+          </a:prstGeom>
+          <a:solidFill>
+            <a:srgbClr val="0078D4"/>
+          </a:solidFill>
+          <a:ln w="12700">
+            <a:solidFill>
+              <a:srgbClr val="0078D4"/>
+            </a:solidFill>
+            <a:prstDash val="solid"/>
+          </a:ln>
+        </p:spPr>
+      </p:sp>
+      <p:sp>
+        <p:nvSpPr>
+          <p:cNvPr id="17" name="Text 15"/>
+          <p:cNvSpPr/>
+          <p:nvPr/>
+        </p:nvSpPr>
+        <p:spPr>
+          <a:xfrm>
+            <a:off x="5596128" y="2779776"/>
+            <a:ext cx="914400" cy="237744"/>
+          </a:xfrm>
+          <a:prstGeom prst="rect">
+            <a:avLst/>
+          </a:prstGeom>
+          <a:noFill/>
+          <a:ln/>
+        </p:spPr>
+        <p:txBody>
+          <a:bodyPr wrap="square" lIns="0" tIns="0" rIns="0" bIns="0" rtlCol="0" anchor="ctr"/>
+          <a:lstStyle/>
+          <a:p>
+            <a:pPr algn="ctr" indent="0" marL="0">
+              <a:buNone/>
+            </a:pPr>
+            <a:r>
+              <a:rPr lang="en-US" sz="850" b="1" dirty="0">
+                <a:solidFill>
+                  <a:srgbClr val="FFFFFF"/>
+                </a:solidFill>
+                <a:latin typeface="Segoe UI" pitchFamily="34" charset="0"/>
+                <a:ea typeface="Segoe UI" pitchFamily="34" charset="-122"/>
+                <a:cs typeface="Segoe UI" pitchFamily="34" charset="-120"/>
+              </a:rPr>
+              <a:t>2  Diagnose</a:t>
+            </a:r>
+            <a:endParaRPr lang="en-US" sz="850" dirty="0"/>
+          </a:p>
+        </p:txBody>
+      </p:sp>
+      <p:sp>
+        <p:nvSpPr>
+          <p:cNvPr id="18" name="Text 16"/>
+          <p:cNvSpPr/>
+          <p:nvPr/>
+        </p:nvSpPr>
+        <p:spPr>
+          <a:xfrm>
+            <a:off x="6583680" y="2743200"/>
+            <a:ext cx="2176272" cy="384048"/>
+          </a:xfrm>
+          <a:prstGeom prst="rect">
+            <a:avLst/>
+          </a:prstGeom>
+          <a:noFill/>
+          <a:ln/>
+        </p:spPr>
+        <p:txBody>
+          <a:bodyPr wrap="square" lIns="0" tIns="0" rIns="0" bIns="0" rtlCol="0" anchor="ctr"/>
+          <a:lstStyle/>
+          <a:p>
+            <a:pPr indent="0" marL="0">
+              <a:buNone/>
+            </a:pPr>
+            <a:r>
+              <a:rPr lang="en-US" sz="950" dirty="0">
+                <a:solidFill>
+                  <a:srgbClr val="201F1E"/>
+                </a:solidFill>
+                <a:latin typeface="Segoe UI" pitchFamily="34" charset="0"/>
+                <a:ea typeface="Segoe UI" pitchFamily="34" charset="-122"/>
+                <a:cs typeface="Segoe UI" pitchFamily="34" charset="-120"/>
+              </a:rPr>
+              <a:t>Open failing case, inspect activity map, find root cause</a:t>
+            </a:r>
+            <a:endParaRPr lang="en-US" sz="950" dirty="0"/>
+          </a:p>
+        </p:txBody>
+      </p:sp>
+      <p:sp>
+        <p:nvSpPr>
+          <p:cNvPr id="19" name="Shape 17"/>
+          <p:cNvSpPr/>
+          <p:nvPr/>
+        </p:nvSpPr>
+        <p:spPr>
+          <a:xfrm>
+            <a:off x="5596128" y="3310128"/>
+            <a:ext cx="914400" cy="237744"/>
+          </a:xfrm>
+          <a:prstGeom prst="rect">
+            <a:avLst/>
+          </a:prstGeom>
+          <a:solidFill>
+            <a:srgbClr val="0078D4"/>
+          </a:solidFill>
+          <a:ln w="12700">
+            <a:solidFill>
+              <a:srgbClr val="0078D4"/>
+            </a:solidFill>
+            <a:prstDash val="solid"/>
+          </a:ln>
+        </p:spPr>
+      </p:sp>
+      <p:sp>
+        <p:nvSpPr>
+          <p:cNvPr id="20" name="Text 18"/>
+          <p:cNvSpPr/>
+          <p:nvPr/>
+        </p:nvSpPr>
+        <p:spPr>
+          <a:xfrm>
+            <a:off x="5596128" y="3310128"/>
+            <a:ext cx="914400" cy="237744"/>
+          </a:xfrm>
+          <a:prstGeom prst="rect">
+            <a:avLst/>
+          </a:prstGeom>
+          <a:noFill/>
+          <a:ln/>
+        </p:spPr>
+        <p:txBody>
+          <a:bodyPr wrap="square" lIns="0" tIns="0" rIns="0" bIns="0" rtlCol="0" anchor="ctr"/>
+          <a:lstStyle/>
+          <a:p>
+            <a:pPr algn="ctr" indent="0" marL="0">
+              <a:buNone/>
+            </a:pPr>
+            <a:r>
+              <a:rPr lang="en-US" sz="850" b="1" dirty="0">
+                <a:solidFill>
+                  <a:srgbClr val="FFFFFF"/>
+                </a:solidFill>
+                <a:latin typeface="Segoe UI" pitchFamily="34" charset="0"/>
+                <a:ea typeface="Segoe UI" pitchFamily="34" charset="-122"/>
+                <a:cs typeface="Segoe UI" pitchFamily="34" charset="-120"/>
+              </a:rPr>
+              <a:t>3  Improve</a:t>
+            </a:r>
+            <a:endParaRPr lang="en-US" sz="850" dirty="0"/>
+          </a:p>
+        </p:txBody>
+      </p:sp>
+      <p:sp>
+        <p:nvSpPr>
+          <p:cNvPr id="21" name="Text 19"/>
+          <p:cNvSpPr/>
+          <p:nvPr/>
+        </p:nvSpPr>
+        <p:spPr>
+          <a:xfrm>
+            <a:off x="6583680" y="3273552"/>
+            <a:ext cx="2176272" cy="384048"/>
+          </a:xfrm>
+          <a:prstGeom prst="rect">
+            <a:avLst/>
+          </a:prstGeom>
+          <a:noFill/>
+          <a:ln/>
+        </p:spPr>
+        <p:txBody>
+          <a:bodyPr wrap="square" lIns="0" tIns="0" rIns="0" bIns="0" rtlCol="0" anchor="ctr"/>
+          <a:lstStyle/>
+          <a:p>
+            <a:pPr indent="0" marL="0">
+              <a:buNone/>
+            </a:pPr>
+            <a:r>
+              <a:rPr lang="en-US" sz="950" dirty="0">
+                <a:solidFill>
+                  <a:srgbClr val="201F1E"/>
+                </a:solidFill>
+                <a:latin typeface="Segoe UI" pitchFamily="34" charset="0"/>
+                <a:ea typeface="Segoe UI" pitchFamily="34" charset="-122"/>
+                <a:cs typeface="Segoe UI" pitchFamily="34" charset="-120"/>
+              </a:rPr>
+              <a:t>Edit instructions, tools, or grounding to fix the issue</a:t>
+            </a:r>
+            <a:endParaRPr lang="en-US" sz="950" dirty="0"/>
+          </a:p>
+        </p:txBody>
+      </p:sp>
+      <p:sp>
+        <p:nvSpPr>
+          <p:cNvPr id="22" name="Shape 20"/>
+          <p:cNvSpPr/>
+          <p:nvPr/>
+        </p:nvSpPr>
+        <p:spPr>
+          <a:xfrm>
+            <a:off x="5596128" y="3840480"/>
+            <a:ext cx="914400" cy="237744"/>
+          </a:xfrm>
+          <a:prstGeom prst="rect">
+            <a:avLst/>
+          </a:prstGeom>
+          <a:solidFill>
+            <a:srgbClr val="0078D4"/>
+          </a:solidFill>
+          <a:ln w="12700">
+            <a:solidFill>
+              <a:srgbClr val="0078D4"/>
+            </a:solidFill>
+            <a:prstDash val="solid"/>
+          </a:ln>
+        </p:spPr>
+      </p:sp>
+      <p:sp>
+        <p:nvSpPr>
+          <p:cNvPr id="23" name="Text 21"/>
+          <p:cNvSpPr/>
+          <p:nvPr/>
+        </p:nvSpPr>
+        <p:spPr>
+          <a:xfrm>
+            <a:off x="5596128" y="3840480"/>
+            <a:ext cx="914400" cy="237744"/>
+          </a:xfrm>
+          <a:prstGeom prst="rect">
+            <a:avLst/>
+          </a:prstGeom>
+          <a:noFill/>
+          <a:ln/>
+        </p:spPr>
+        <p:txBody>
+          <a:bodyPr wrap="square" lIns="0" tIns="0" rIns="0" bIns="0" rtlCol="0" anchor="ctr"/>
+          <a:lstStyle/>
+          <a:p>
+            <a:pPr algn="ctr" indent="0" marL="0">
+              <a:buNone/>
+            </a:pPr>
+            <a:r>
+              <a:rPr lang="en-US" sz="850" b="1" dirty="0">
+                <a:solidFill>
+                  <a:srgbClr val="FFFFFF"/>
+                </a:solidFill>
+                <a:latin typeface="Segoe UI" pitchFamily="34" charset="0"/>
+                <a:ea typeface="Segoe UI" pitchFamily="34" charset="-122"/>
+                <a:cs typeface="Segoe UI" pitchFamily="34" charset="-120"/>
+              </a:rPr>
+              <a:t>4  Re-evaluate</a:t>
+            </a:r>
+            <a:endParaRPr lang="en-US" sz="850" dirty="0"/>
+          </a:p>
+        </p:txBody>
+      </p:sp>
+      <p:sp>
+        <p:nvSpPr>
+          <p:cNvPr id="24" name="Text 22"/>
+          <p:cNvSpPr/>
+          <p:nvPr/>
+        </p:nvSpPr>
+        <p:spPr>
+          <a:xfrm>
+            <a:off x="6583680" y="3803904"/>
+            <a:ext cx="2176272" cy="384048"/>
+          </a:xfrm>
+          <a:prstGeom prst="rect">
+            <a:avLst/>
+          </a:prstGeom>
+          <a:noFill/>
+          <a:ln/>
+        </p:spPr>
+        <p:txBody>
+          <a:bodyPr wrap="square" lIns="0" tIns="0" rIns="0" bIns="0" rtlCol="0" anchor="ctr"/>
+          <a:lstStyle/>
+          <a:p>
+            <a:pPr indent="0" marL="0">
+              <a:buNone/>
+            </a:pPr>
+            <a:r>
+              <a:rPr lang="en-US" sz="950" dirty="0">
+                <a:solidFill>
+                  <a:srgbClr val="201F1E"/>
+                </a:solidFill>
+                <a:latin typeface="Segoe UI" pitchFamily="34" charset="0"/>
+                <a:ea typeface="Segoe UI" pitchFamily="34" charset="-122"/>
+                <a:cs typeface="Segoe UI" pitchFamily="34" charset="-120"/>
+              </a:rPr>
+              <a:t>Run test set again and compare with the previous run</a:t>
+            </a:r>
+            <a:endParaRPr lang="en-US" sz="950" dirty="0"/>
+          </a:p>
+        </p:txBody>
+      </p:sp>
+      <p:sp>
+        <p:nvSpPr>
+          <p:cNvPr id="25" name="Shape 23"/>
+          <p:cNvSpPr/>
+          <p:nvPr/>
+        </p:nvSpPr>
+        <p:spPr>
+          <a:xfrm>
+            <a:off x="320040" y="4681728"/>
+            <a:ext cx="8503920" cy="320040"/>
+          </a:xfrm>
+          <a:prstGeom prst="rect">
+            <a:avLst/>
+          </a:prstGeom>
+          <a:solidFill>
+            <a:srgbClr val="EFF6FC"/>
+          </a:solidFill>
+          <a:ln w="12700">
+            <a:solidFill>
+              <a:srgbClr val="C7E0F4"/>
+            </a:solidFill>
+            <a:prstDash val="solid"/>
+          </a:ln>
+        </p:spPr>
+      </p:sp>
+      <p:sp>
+        <p:nvSpPr>
+          <p:cNvPr id="26" name="Text 24"/>
+          <p:cNvSpPr/>
+          <p:nvPr/>
+        </p:nvSpPr>
+        <p:spPr>
+          <a:xfrm>
+            <a:off x="475488" y="4681728"/>
+            <a:ext cx="8321040" cy="320040"/>
+          </a:xfrm>
+          <a:prstGeom prst="rect">
+            <a:avLst/>
+          </a:prstGeom>
+          <a:noFill/>
+          <a:ln/>
+        </p:spPr>
+        <p:txBody>
+          <a:bodyPr wrap="square" rtlCol="0" anchor="ctr"/>
+          <a:lstStyle/>
+          <a:p>
+            <a:pPr indent="0" marL="0">
+              <a:buNone/>
+            </a:pPr>
+            <a:r>
+              <a:rPr lang="en-US" sz="1050" dirty="0">
+                <a:solidFill>
+                  <a:srgbClr val="0078D4"/>
+                </a:solidFill>
+                <a:latin typeface="Segoe UI" pitchFamily="34" charset="0"/>
+                <a:ea typeface="Segoe UI" pitchFamily="34" charset="-122"/>
+                <a:cs typeface="Segoe UI" pitchFamily="34" charset="-120"/>
+              </a:rPr>
+              <a:t>Keep the test set after the workshop — rerun it after future changes to detect regressions before they reach users.</a:t>
+            </a:r>
+            <a:endParaRPr lang="en-US" sz="1050" dirty="0"/>
+          </a:p>
+        </p:txBody>
+      </p:sp>
+    </p:spTree>
+  </p:cSld>
+  <p:clrMapOvr>
+    <a:masterClrMapping/>
+  </p:clrMapOvr>
+</p:sld>
+</file>
+
 <file path=ppt/theme/theme1.xml><?xml version="1.0" encoding="utf-8"?>
 <a:theme xmlns:a="http://schemas.openxmlformats.org/drawingml/2006/main" name="Office Theme">
   <a:themeElements>
